--- a/slides/ch10-proposals-and-formal-reports.pptx
+++ b/slides/ch10-proposals-and-formal-reports.pptx
@@ -6523,7 +6523,7 @@
                 </a:solidFill>
                 <a:latin typeface="Calibri"/>
               </a:rPr>
-              <a:t>BADM 225 · Chapter 10</a:t>
+              <a:t>BADM 225 · Chapter 10  ·  © Derek D. Bussan</a:t>
             </a:r>
           </a:p>
         </p:txBody>
@@ -6810,7 +6810,7 @@
                 </a:solidFill>
                 <a:latin typeface="Calibri"/>
               </a:rPr>
-              <a:t>BADM 225 · Chapter 10</a:t>
+              <a:t>BADM 225 · Chapter 10  ·  © Derek D. Bussan</a:t>
             </a:r>
           </a:p>
         </p:txBody>
@@ -7097,7 +7097,7 @@
                 </a:solidFill>
                 <a:latin typeface="Calibri"/>
               </a:rPr>
-              <a:t>BADM 225 · Chapter 10</a:t>
+              <a:t>BADM 225 · Chapter 10  ·  © Derek D. Bussan</a:t>
             </a:r>
           </a:p>
         </p:txBody>
@@ -7462,7 +7462,7 @@
                 </a:solidFill>
                 <a:latin typeface="Calibri"/>
               </a:rPr>
-              <a:t>BADM 225 · Chapter 10</a:t>
+              <a:t>BADM 225 · Chapter 10  ·  © Derek D. Bussan</a:t>
             </a:r>
           </a:p>
         </p:txBody>
@@ -7590,7 +7590,7 @@
                 </a:solidFill>
                 <a:latin typeface="Calibri"/>
               </a:rPr>
-              <a:t>BADM 225 · Chapter 10</a:t>
+              <a:t>BADM 225 · Chapter 10  ·  © Derek D. Bussan</a:t>
             </a:r>
           </a:p>
         </p:txBody>
@@ -7877,7 +7877,7 @@
                 </a:solidFill>
                 <a:latin typeface="Calibri"/>
               </a:rPr>
-              <a:t>BADM 225 · Chapter 10</a:t>
+              <a:t>BADM 225 · Chapter 10  ·  © Derek D. Bussan</a:t>
             </a:r>
           </a:p>
         </p:txBody>
@@ -8437,7 +8437,7 @@
                 </a:solidFill>
                 <a:latin typeface="Calibri"/>
               </a:rPr>
-              <a:t>BADM 225 · Chapter 10</a:t>
+              <a:t>BADM 225 · Chapter 10  ·  © Derek D. Bussan</a:t>
             </a:r>
           </a:p>
         </p:txBody>
@@ -8724,7 +8724,7 @@
                 </a:solidFill>
                 <a:latin typeface="Calibri"/>
               </a:rPr>
-              <a:t>BADM 225 · Chapter 10</a:t>
+              <a:t>BADM 225 · Chapter 10  ·  © Derek D. Bussan</a:t>
             </a:r>
           </a:p>
         </p:txBody>
@@ -9089,7 +9089,7 @@
                 </a:solidFill>
                 <a:latin typeface="Calibri"/>
               </a:rPr>
-              <a:t>BADM 225 · Chapter 10</a:t>
+              <a:t>BADM 225 · Chapter 10  ·  © Derek D. Bussan</a:t>
             </a:r>
           </a:p>
         </p:txBody>
@@ -9217,7 +9217,7 @@
                 </a:solidFill>
                 <a:latin typeface="Calibri"/>
               </a:rPr>
-              <a:t>BADM 225 · Chapter 10</a:t>
+              <a:t>BADM 225 · Chapter 10  ·  © Derek D. Bussan</a:t>
             </a:r>
           </a:p>
         </p:txBody>
@@ -9687,7 +9687,7 @@
                 </a:solidFill>
                 <a:latin typeface="Calibri"/>
               </a:rPr>
-              <a:t>BADM 225 · Chapter 10</a:t>
+              <a:t>BADM 225 · Chapter 10  ·  © Derek D. Bussan</a:t>
             </a:r>
           </a:p>
         </p:txBody>
@@ -10042,7 +10042,7 @@
                 </a:solidFill>
                 <a:latin typeface="Calibri"/>
               </a:rPr>
-              <a:t>BADM 225 · Chapter 10</a:t>
+              <a:t>BADM 225 · Chapter 10  ·  © Derek D. Bussan</a:t>
             </a:r>
           </a:p>
         </p:txBody>
@@ -10602,7 +10602,7 @@
                 </a:solidFill>
                 <a:latin typeface="Calibri"/>
               </a:rPr>
-              <a:t>BADM 225 · Chapter 10</a:t>
+              <a:t>BADM 225 · Chapter 10  ·  © Derek D. Bussan</a:t>
             </a:r>
           </a:p>
         </p:txBody>
@@ -11164,7 +11164,7 @@
                 </a:solidFill>
                 <a:latin typeface="Calibri"/>
               </a:rPr>
-              <a:t>BADM 225 · Chapter 10</a:t>
+              <a:t>BADM 225 · Chapter 10  ·  © Derek D. Bussan</a:t>
             </a:r>
           </a:p>
         </p:txBody>
@@ -11451,7 +11451,7 @@
                 </a:solidFill>
                 <a:latin typeface="Calibri"/>
               </a:rPr>
-              <a:t>BADM 225 · Chapter 10</a:t>
+              <a:t>BADM 225 · Chapter 10  ·  © Derek D. Bussan</a:t>
             </a:r>
           </a:p>
         </p:txBody>
@@ -11893,7 +11893,7 @@
                 </a:solidFill>
                 <a:latin typeface="Calibri"/>
               </a:rPr>
-              <a:t>BADM 225 · Chapter 10</a:t>
+              <a:t>BADM 225 · Chapter 10  ·  © Derek D. Bussan</a:t>
             </a:r>
           </a:p>
         </p:txBody>
@@ -12258,7 +12258,7 @@
                 </a:solidFill>
                 <a:latin typeface="Calibri"/>
               </a:rPr>
-              <a:t>BADM 225 · Chapter 10</a:t>
+              <a:t>BADM 225 · Chapter 10  ·  © Derek D. Bussan</a:t>
             </a:r>
           </a:p>
         </p:txBody>
@@ -12386,7 +12386,7 @@
                 </a:solidFill>
                 <a:latin typeface="Calibri"/>
               </a:rPr>
-              <a:t>BADM 225 · Chapter 10</a:t>
+              <a:t>BADM 225 · Chapter 10  ·  © Derek D. Bussan</a:t>
             </a:r>
           </a:p>
         </p:txBody>
@@ -13093,7 +13093,7 @@
                 </a:solidFill>
                 <a:latin typeface="Calibri"/>
               </a:rPr>
-              <a:t>BADM 225 · Chapter 10</a:t>
+              <a:t>BADM 225 · Chapter 10  ·  © Derek D. Bussan</a:t>
             </a:r>
           </a:p>
         </p:txBody>
@@ -13380,7 +13380,7 @@
                 </a:solidFill>
                 <a:latin typeface="Calibri"/>
               </a:rPr>
-              <a:t>BADM 225 · Chapter 10</a:t>
+              <a:t>BADM 225 · Chapter 10  ·  © Derek D. Bussan</a:t>
             </a:r>
           </a:p>
         </p:txBody>
@@ -13979,7 +13979,7 @@
                 </a:solidFill>
                 <a:latin typeface="Calibri"/>
               </a:rPr>
-              <a:t>BADM 225 · Chapter 10</a:t>
+              <a:t>BADM 225 · Chapter 10  ·  © Derek D. Bussan</a:t>
             </a:r>
           </a:p>
         </p:txBody>
@@ -14266,7 +14266,7 @@
                 </a:solidFill>
                 <a:latin typeface="Calibri"/>
               </a:rPr>
-              <a:t>BADM 225 · Chapter 10</a:t>
+              <a:t>BADM 225 · Chapter 10  ·  © Derek D. Bussan</a:t>
             </a:r>
           </a:p>
         </p:txBody>
@@ -14592,7 +14592,7 @@
                 </a:solidFill>
                 <a:latin typeface="Calibri"/>
               </a:rPr>
-              <a:t>BADM 225 · Chapter 10</a:t>
+              <a:t>BADM 225 · Chapter 10  ·  © Derek D. Bussan</a:t>
             </a:r>
           </a:p>
         </p:txBody>
@@ -14957,7 +14957,7 @@
                 </a:solidFill>
                 <a:latin typeface="Calibri"/>
               </a:rPr>
-              <a:t>BADM 225 · Chapter 10</a:t>
+              <a:t>BADM 225 · Chapter 10  ·  © Derek D. Bussan</a:t>
             </a:r>
           </a:p>
         </p:txBody>
@@ -15085,7 +15085,7 @@
                 </a:solidFill>
                 <a:latin typeface="Calibri"/>
               </a:rPr>
-              <a:t>BADM 225 · Chapter 10</a:t>
+              <a:t>BADM 225 · Chapter 10  ·  © Derek D. Bussan</a:t>
             </a:r>
           </a:p>
         </p:txBody>
@@ -15372,7 +15372,7 @@
                 </a:solidFill>
                 <a:latin typeface="Calibri"/>
               </a:rPr>
-              <a:t>BADM 225 · Chapter 10</a:t>
+              <a:t>BADM 225 · Chapter 10  ·  © Derek D. Bussan</a:t>
             </a:r>
           </a:p>
         </p:txBody>
@@ -15659,7 +15659,7 @@
                 </a:solidFill>
                 <a:latin typeface="Calibri"/>
               </a:rPr>
-              <a:t>BADM 225 · Chapter 10</a:t>
+              <a:t>BADM 225 · Chapter 10  ·  © Derek D. Bussan</a:t>
             </a:r>
           </a:p>
         </p:txBody>
@@ -15946,7 +15946,7 @@
                 </a:solidFill>
                 <a:latin typeface="Calibri"/>
               </a:rPr>
-              <a:t>BADM 225 · Chapter 10</a:t>
+              <a:t>BADM 225 · Chapter 10  ·  © Derek D. Bussan</a:t>
             </a:r>
           </a:p>
         </p:txBody>
@@ -16233,7 +16233,7 @@
                 </a:solidFill>
                 <a:latin typeface="Calibri"/>
               </a:rPr>
-              <a:t>BADM 225 · Chapter 10</a:t>
+              <a:t>BADM 225 · Chapter 10  ·  © Derek D. Bussan</a:t>
             </a:r>
           </a:p>
         </p:txBody>
@@ -16675,7 +16675,7 @@
                 </a:solidFill>
                 <a:latin typeface="Calibri"/>
               </a:rPr>
-              <a:t>BADM 225 · Chapter 10</a:t>
+              <a:t>BADM 225 · Chapter 10  ·  © Derek D. Bussan</a:t>
             </a:r>
           </a:p>
         </p:txBody>
@@ -17490,7 +17490,7 @@
                 </a:solidFill>
                 <a:latin typeface="Calibri"/>
               </a:rPr>
-              <a:t>BADM 225 · Chapter 10</a:t>
+              <a:t>BADM 225 · Chapter 10  ·  © Derek D. Bussan</a:t>
             </a:r>
           </a:p>
         </p:txBody>
@@ -17766,7 +17766,7 @@
                 </a:solidFill>
                 <a:latin typeface="Calibri"/>
               </a:rPr>
-              <a:t>BADM 225 · Chapter 10</a:t>
+              <a:t>BADM 225 · Chapter 10  ·  © Derek D. Bussan</a:t>
             </a:r>
           </a:p>
         </p:txBody>
@@ -17937,7 +17937,7 @@
                 </a:solidFill>
                 <a:latin typeface="Calibri"/>
               </a:rPr>
-              <a:t>BADM 225 · Chapter 10</a:t>
+              <a:t>BADM 225 · Chapter 10  ·  © Derek D. Bussan</a:t>
             </a:r>
           </a:p>
         </p:txBody>
@@ -18065,7 +18065,7 @@
                 </a:solidFill>
                 <a:latin typeface="Calibri"/>
               </a:rPr>
-              <a:t>BADM 225 · Chapter 10</a:t>
+              <a:t>BADM 225 · Chapter 10  ·  © Derek D. Bussan</a:t>
             </a:r>
           </a:p>
         </p:txBody>
@@ -18386,7 +18386,7 @@
                 </a:solidFill>
                 <a:latin typeface="Calibri"/>
               </a:rPr>
-              <a:t>BADM 225 · Chapter 10</a:t>
+              <a:t>BADM 225 · Chapter 10  ·  © Derek D. Bussan</a:t>
             </a:r>
           </a:p>
         </p:txBody>
@@ -18846,7 +18846,7 @@
                 </a:solidFill>
                 <a:latin typeface="Calibri"/>
               </a:rPr>
-              <a:t>BADM 225 · Chapter 10</a:t>
+              <a:t>BADM 225 · Chapter 10  ·  © Derek D. Bussan</a:t>
             </a:r>
           </a:p>
         </p:txBody>
@@ -19306,7 +19306,7 @@
                 </a:solidFill>
                 <a:latin typeface="Calibri"/>
               </a:rPr>
-              <a:t>BADM 225 · Chapter 10</a:t>
+              <a:t>BADM 225 · Chapter 10  ·  © Derek D. Bussan</a:t>
             </a:r>
           </a:p>
         </p:txBody>
@@ -20052,7 +20052,7 @@
                 </a:solidFill>
                 <a:latin typeface="Calibri"/>
               </a:rPr>
-              <a:t>BADM 225 · Chapter 10</a:t>
+              <a:t>BADM 225 · Chapter 10  ·  © Derek D. Bussan</a:t>
             </a:r>
           </a:p>
         </p:txBody>
@@ -20339,7 +20339,7 @@
                 </a:solidFill>
                 <a:latin typeface="Calibri"/>
               </a:rPr>
-              <a:t>BADM 225 · Chapter 10</a:t>
+              <a:t>BADM 225 · Chapter 10  ·  © Derek D. Bussan</a:t>
             </a:r>
           </a:p>
         </p:txBody>

--- a/slides/ch10-proposals-and-formal-reports.pptx
+++ b/slides/ch10-proposals-and-formal-reports.pptx
@@ -6430,7 +6430,7 @@
                 </a:solidFill>
                 <a:latin typeface="Calibri"/>
               </a:rPr>
-              <a:t>BADM 225 · Chapter 10  ·  Original instructional material — no publisher content</a:t>
+              <a:t>BADM 225 · Chapter 10  ·  Original material © 2026 Derek D. Bussan, PhD, MBA  ·  No publisher content</a:t>
             </a:r>
           </a:p>
         </p:txBody>
